--- a/dist/초4/과학/땅과밤하늘/초4_과학_땅과밤하늘_03_태양계.pptx
+++ b/dist/초4/과학/땅과밤하늘/초4_과학_땅과밤하늘_03_태양계.pptx
@@ -125,13 +125,13 @@
   <p:extLst>
     <p:ext uri="{521415D9-36F7-43E2-AB2F-B90AF26B5E84}">
       <p14:sectionLst xmlns:p14="http://schemas.microsoft.com/office/powerpoint/2010/main">
-        <p14:section name="도입" id="{3f315160-0622-6604-42d3-2e7c5e2bcf6d}">
+        <p14:section name="도입" id="{7817dc75-c581-fef0-fcd6-672c39a56996}">
           <p14:sldIdLst>
             <p14:sldId id="256"/>
             <p14:sldId id="257"/>
           </p14:sldIdLst>
         </p14:section>
-        <p14:section name="개념" id="{8232462a-3201-bf56-12e4-ac3ffdc312e5}">
+        <p14:section name="개념" id="{65ba09e7-fff3-6ea7-72ed-11c4db871eb7}">
           <p14:sldIdLst>
             <p14:sldId id="258"/>
             <p14:sldId id="259"/>
@@ -139,7 +139,7 @@
             <p14:sldId id="268"/>
           </p14:sldIdLst>
         </p14:section>
-        <p14:section name="연습" id="{d714c18c-83fa-c218-2df4-edd96039551f}">
+        <p14:section name="연습" id="{2f48cf19-3472-a7b5-531d-04b664a86589}">
           <p14:sldIdLst>
             <p14:sldId id="260"/>
             <p14:sldId id="261"/>
@@ -151,31 +151,31 @@
             <p14:sldId id="269"/>
           </p14:sldIdLst>
         </p14:section>
-        <p14:section name="개념" id="{b8c7b6cb-8d07-b3e9-d53d-ab494eb188cc}">
+        <p14:section name="개념" id="{38cc3798-74d6-7574-2963-c2cab7a58b96}">
           <p14:sldIdLst/>
         </p14:section>
-        <p14:section name="연습" id="{23786910-39de-1b38-f70d-5f0c5a1aa65b}">
+        <p14:section name="연습" id="{73173079-af84-1e56-5cc1-0518dc7c9aaa}">
           <p14:sldIdLst/>
         </p14:section>
-        <p14:section name="개념" id="{3e2cfc71-2468-79ff-83f7-4b8c8c3223ab}">
+        <p14:section name="개념" id="{51255581-6d26-b435-9171-fb90459cccd4}">
           <p14:sldIdLst/>
         </p14:section>
-        <p14:section name="연습" id="{2e6a075f-fb49-3b31-0564-f443fdc1a9a0}">
+        <p14:section name="연습" id="{12d1a223-fb14-8c72-f20c-2a933e538ef5}">
           <p14:sldIdLst/>
         </p14:section>
-        <p14:section name="확인" id="{1d920179-95c9-7b92-61ab-8f493b0b33ba}">
+        <p14:section name="확인" id="{ca444513-7e4c-03c5-3634-c0e01f404e69}">
           <p14:sldIdLst>
             <p14:sldId id="270"/>
             <p14:sldId id="271"/>
             <p14:sldId id="272"/>
           </p14:sldIdLst>
         </p14:section>
-        <p14:section name="정리" id="{489d390e-520f-5ffc-078e-67981295132a}">
+        <p14:section name="정리" id="{09937ffa-d7d1-7987-ebda-f52df898492d}">
           <p14:sldIdLst>
             <p14:sldId id="273"/>
           </p14:sldIdLst>
         </p14:section>
-        <p14:section name="보충" id="{4415dda1-a0e2-04bc-cba0-b12096074cd0}">
+        <p14:section name="보충" id="{06778670-136f-757b-8829-a0ee56479997}">
           <p14:sldIdLst>
             <p14:sldId id="274"/>
           </p14:sldIdLst>
